--- a/rapports/septembre/Cdiscount_Voyages_Sejours_sept2026.pptx
+++ b/rapports/septembre/Cdiscount_Voyages_Sejours_sept2026.pptx
@@ -3242,7 +3242,7 @@
                 </a:solidFill>
                 <a:latin typeface="Arial"/>
               </a:rPr>
-              <a:t>Cdiscount Voyages · Séjours</a:t>
+              <a:t>Cdiscount Voyages – Séjours</a:t>
             </a:r>
           </a:p>
         </p:txBody>
@@ -3682,7 +3682,7 @@
                 </a:solidFill>
                 <a:latin typeface="Arial"/>
               </a:rPr>
-              <a:t>YTD 2 717 814</a:t>
+              <a:t>YTD 5 924 632</a:t>
             </a:r>
           </a:p>
         </p:txBody>
@@ -3947,7 +3947,7 @@
                 </a:solidFill>
                 <a:latin typeface="Arial"/>
               </a:rPr>
-              <a:t>YTD 7 533</a:t>
+              <a:t>YTD 12 654</a:t>
             </a:r>
           </a:p>
         </p:txBody>
@@ -4212,7 +4212,7 @@
                 </a:solidFill>
                 <a:latin typeface="Arial"/>
               </a:rPr>
-              <a:t>YTD 0,28 %</a:t>
+              <a:t>YTD 0,21 %</a:t>
             </a:r>
           </a:p>
         </p:txBody>
@@ -4477,7 +4477,7 @@
                 </a:solidFill>
                 <a:latin typeface="Arial"/>
               </a:rPr>
-              <a:t>YTD 6</a:t>
+              <a:t>YTD 25</a:t>
             </a:r>
           </a:p>
         </p:txBody>
@@ -4742,7 +4742,7 @@
                 </a:solidFill>
                 <a:latin typeface="Arial"/>
               </a:rPr>
-              <a:t>YTD 0,08 %</a:t>
+              <a:t>YTD 0,20 %</a:t>
             </a:r>
           </a:p>
         </p:txBody>
@@ -5007,7 +5007,7 @@
                 </a:solidFill>
                 <a:latin typeface="Arial"/>
               </a:rPr>
-              <a:t>YTD 0,97</a:t>
+              <a:t>YTD —</a:t>
             </a:r>
           </a:p>
         </p:txBody>
@@ -5879,7 +5879,7 @@
                 </a:solidFill>
                 <a:latin typeface="Arial"/>
               </a:rPr>
-              <a:t>MARQUES CITÉES</a:t>
+              <a:t>CATÉGORIES DE PRODUITS</a:t>
             </a:r>
           </a:p>
         </p:txBody>
@@ -5914,7 +5914,7 @@
                 </a:solidFill>
                 <a:latin typeface="Arial"/>
               </a:rPr>
-              <a:t>Part de voix dans les messages utilisateurs</a:t>
+              <a:t>Répartition des requêtes</a:t>
             </a:r>
           </a:p>
         </p:txBody>
@@ -6007,7 +6007,7 @@
         <p:spPr>
           <a:xfrm>
             <a:off x="8296656" y="4389120"/>
-            <a:ext cx="2072640" cy="152400"/>
+            <a:ext cx="2225040" cy="152400"/>
           </a:xfrm>
           <a:prstGeom prst="rect">
             <a:avLst/>
@@ -6028,7 +6028,7 @@
                 </a:solidFill>
                 <a:latin typeface="Arial"/>
               </a:rPr>
-              <a:t>Airbnb</a:t>
+              <a:t>Campings et camping-cars</a:t>
             </a:r>
           </a:p>
         </p:txBody>
@@ -6041,7 +6041,7 @@
         </p:nvSpPr>
         <p:spPr>
           <a:xfrm>
-            <a:off x="8077200" y="4675632"/>
+            <a:off x="8077200" y="4626864"/>
             <a:ext cx="121920" cy="121920"/>
           </a:xfrm>
           <a:prstGeom prst="rect">
@@ -6085,8 +6085,8 @@
         </p:nvSpPr>
         <p:spPr>
           <a:xfrm>
-            <a:off x="8296656" y="4657344"/>
-            <a:ext cx="2072640" cy="152400"/>
+            <a:off x="8296656" y="4608576"/>
+            <a:ext cx="2225040" cy="152400"/>
           </a:xfrm>
           <a:prstGeom prst="rect">
             <a:avLst/>
@@ -6107,7 +6107,7 @@
                 </a:solidFill>
                 <a:latin typeface="Arial"/>
               </a:rPr>
-              <a:t>Booking · 22 %</a:t>
+              <a:t>Hôtels et hébergements · 28 %</a:t>
             </a:r>
           </a:p>
         </p:txBody>
@@ -6120,7 +6120,7 @@
         </p:nvSpPr>
         <p:spPr>
           <a:xfrm>
-            <a:off x="8077200" y="4943856"/>
+            <a:off x="8077200" y="4846320"/>
             <a:ext cx="121920" cy="121920"/>
           </a:xfrm>
           <a:prstGeom prst="rect">
@@ -6164,8 +6164,8 @@
         </p:nvSpPr>
         <p:spPr>
           <a:xfrm>
-            <a:off x="8296656" y="4925568"/>
-            <a:ext cx="2072640" cy="152400"/>
+            <a:off x="8296656" y="4828032"/>
+            <a:ext cx="2225040" cy="152400"/>
           </a:xfrm>
           <a:prstGeom prst="rect">
             <a:avLst/>
@@ -6180,13 +6180,13 @@
           <a:p>
             <a:pPr algn="l"/>
             <a:r>
-              <a:rPr sz="1000" b="0" i="0">
+              <a:rPr sz="800" b="0" i="0">
                 <a:solidFill>
                   <a:srgbClr val="111111"/>
                 </a:solidFill>
                 <a:latin typeface="Arial"/>
               </a:rPr>
-              <a:t>Opodo · 7 %</a:t>
+              <a:t>Croisières, ferries et trains · 14 %</a:t>
             </a:r>
           </a:p>
         </p:txBody>
@@ -6199,7 +6199,7 @@
         </p:nvSpPr>
         <p:spPr>
           <a:xfrm>
-            <a:off x="8077200" y="5212080"/>
+            <a:off x="8077200" y="5065776"/>
             <a:ext cx="121920" cy="121920"/>
           </a:xfrm>
           <a:prstGeom prst="rect">
@@ -6243,8 +6243,8 @@
         </p:nvSpPr>
         <p:spPr>
           <a:xfrm>
-            <a:off x="8296656" y="5193792"/>
-            <a:ext cx="2072640" cy="152400"/>
+            <a:off x="8296656" y="5047488"/>
+            <a:ext cx="2225040" cy="152400"/>
           </a:xfrm>
           <a:prstGeom prst="rect">
             <a:avLst/>
@@ -6265,7 +6265,7 @@
                 </a:solidFill>
                 <a:latin typeface="Arial"/>
               </a:rPr>
-              <a:t>Club Med · 7 %</a:t>
+              <a:t>Séjours tout compris · 8 %</a:t>
             </a:r>
           </a:p>
         </p:txBody>
@@ -6278,7 +6278,7 @@
         </p:nvSpPr>
         <p:spPr>
           <a:xfrm>
-            <a:off x="8077200" y="5480304"/>
+            <a:off x="8077200" y="5285232"/>
             <a:ext cx="121920" cy="121920"/>
           </a:xfrm>
           <a:prstGeom prst="rect">
@@ -6322,8 +6322,8 @@
         </p:nvSpPr>
         <p:spPr>
           <a:xfrm>
-            <a:off x="8296656" y="5462016"/>
-            <a:ext cx="2072640" cy="152400"/>
+            <a:off x="8296656" y="5266944"/>
+            <a:ext cx="2225040" cy="152400"/>
           </a:xfrm>
           <a:prstGeom prst="rect">
             <a:avLst/>
@@ -6344,7 +6344,7 @@
                 </a:solidFill>
                 <a:latin typeface="Arial"/>
               </a:rPr>
-              <a:t>Pierre &amp; Vacances · 6 %</a:t>
+              <a:t>Parcs et séjours en famille · 5 %</a:t>
             </a:r>
           </a:p>
         </p:txBody>
@@ -6357,7 +6357,7 @@
         </p:nvSpPr>
         <p:spPr>
           <a:xfrm>
-            <a:off x="8077200" y="5748528"/>
+            <a:off x="8077200" y="5504688"/>
             <a:ext cx="121920" cy="121920"/>
           </a:xfrm>
           <a:prstGeom prst="rect">
@@ -6401,8 +6401,8 @@
         </p:nvSpPr>
         <p:spPr>
           <a:xfrm>
-            <a:off x="8296656" y="5730240"/>
-            <a:ext cx="2072640" cy="152400"/>
+            <a:off x="8296656" y="5486400"/>
+            <a:ext cx="2225040" cy="152400"/>
           </a:xfrm>
           <a:prstGeom prst="rect">
             <a:avLst/>
@@ -6423,7 +6423,7 @@
                 </a:solidFill>
                 <a:latin typeface="Arial"/>
               </a:rPr>
-              <a:t>Autres (Cdiscount Voyages &lt; 0,1 %) · 26 %</a:t>
+              <a:t>Vols et billets d'avion · 4 %</a:t>
             </a:r>
           </a:p>
         </p:txBody>
@@ -6436,8 +6436,87 @@
         </p:nvSpPr>
         <p:spPr>
           <a:xfrm>
+            <a:off x="8077200" y="5724144"/>
+            <a:ext cx="121920" cy="121920"/>
+          </a:xfrm>
+          <a:prstGeom prst="rect">
+            <a:avLst/>
+          </a:prstGeom>
+          <a:solidFill>
+            <a:srgbClr val="8CB36B"/>
+          </a:solidFill>
+          <a:ln>
+            <a:noFill/>
+          </a:ln>
+          <a:effectLst/>
+        </p:spPr>
+        <p:style>
+          <a:lnRef idx="1">
+            <a:schemeClr val="accent1"/>
+          </a:lnRef>
+          <a:fillRef idx="3">
+            <a:schemeClr val="accent1"/>
+          </a:fillRef>
+          <a:effectRef idx="2">
+            <a:schemeClr val="accent1"/>
+          </a:effectRef>
+          <a:fontRef idx="minor">
+            <a:schemeClr val="lt1"/>
+          </a:fontRef>
+        </p:style>
+        <p:txBody>
+          <a:bodyPr rtlCol="0" anchor="ctr"/>
+          <a:lstStyle/>
+          <a:p>
+            <a:pPr algn="ctr"/>
+          </a:p>
+        </p:txBody>
+      </p:sp>
+      <p:sp>
+        <p:nvSpPr>
+          <p:cNvPr id="87" name="TextBox 86"/>
+          <p:cNvSpPr txBox="1"/>
+          <p:nvPr/>
+        </p:nvSpPr>
+        <p:spPr>
+          <a:xfrm>
+            <a:off x="8296656" y="5705856"/>
+            <a:ext cx="2225040" cy="152400"/>
+          </a:xfrm>
+          <a:prstGeom prst="rect">
+            <a:avLst/>
+          </a:prstGeom>
+          <a:noFill/>
+        </p:spPr>
+        <p:txBody>
+          <a:bodyPr wrap="square" anchor="t" lIns="0" rIns="0" tIns="0" bIns="0">
+            <a:spAutoFit/>
+          </a:bodyPr>
+          <a:lstStyle/>
+          <a:p>
+            <a:pPr algn="l"/>
+            <a:r>
+              <a:rPr sz="1000" b="0" i="0">
+                <a:solidFill>
+                  <a:srgbClr val="111111"/>
+                </a:solidFill>
+                <a:latin typeface="Arial"/>
+              </a:rPr>
+              <a:t>Bien-être et thalasso · 1 %</a:t>
+            </a:r>
+          </a:p>
+        </p:txBody>
+      </p:sp>
+      <p:sp>
+        <p:nvSpPr>
+          <p:cNvPr id="88" name="Rectangle 87"/>
+          <p:cNvSpPr/>
+          <p:nvPr/>
+        </p:nvSpPr>
+        <p:spPr>
+          <a:xfrm>
             <a:off x="10564368" y="4450080"/>
-            <a:ext cx="475488" cy="429158"/>
+            <a:ext cx="475488" cy="536448"/>
           </a:xfrm>
           <a:prstGeom prst="rect">
             <a:avLst/>
@@ -6474,14 +6553,14 @@
       </p:sp>
       <p:sp>
         <p:nvSpPr>
-          <p:cNvPr id="87" name="TextBox 86"/>
+          <p:cNvPr id="89" name="TextBox 88"/>
           <p:cNvSpPr txBox="1"/>
           <p:nvPr/>
         </p:nvSpPr>
         <p:spPr>
           <a:xfrm>
             <a:off x="10564368" y="4450080"/>
-            <a:ext cx="475488" cy="429158"/>
+            <a:ext cx="475488" cy="536448"/>
           </a:xfrm>
           <a:prstGeom prst="rect">
             <a:avLst/>
@@ -6502,21 +6581,21 @@
                 </a:solidFill>
                 <a:latin typeface="Arial"/>
               </a:rPr>
-              <a:t>32 %</a:t>
-            </a:r>
-          </a:p>
-        </p:txBody>
-      </p:sp>
-      <p:sp>
-        <p:nvSpPr>
-          <p:cNvPr id="88" name="Rectangle 87"/>
+              <a:t>40 %</a:t>
+            </a:r>
+          </a:p>
+        </p:txBody>
+      </p:sp>
+      <p:sp>
+        <p:nvSpPr>
+          <p:cNvPr id="90" name="Rectangle 89"/>
           <p:cNvSpPr/>
           <p:nvPr/>
         </p:nvSpPr>
         <p:spPr>
           <a:xfrm>
-            <a:off x="10564368" y="4879238"/>
-            <a:ext cx="475488" cy="295046"/>
+            <a:off x="10564368" y="4986528"/>
+            <a:ext cx="475488" cy="375513"/>
           </a:xfrm>
           <a:prstGeom prst="rect">
             <a:avLst/>
@@ -6553,14 +6632,49 @@
       </p:sp>
       <p:sp>
         <p:nvSpPr>
-          <p:cNvPr id="89" name="Rectangle 88"/>
+          <p:cNvPr id="91" name="TextBox 90"/>
+          <p:cNvSpPr txBox="1"/>
+          <p:nvPr/>
+        </p:nvSpPr>
+        <p:spPr>
+          <a:xfrm>
+            <a:off x="10564368" y="4986528"/>
+            <a:ext cx="475488" cy="375513"/>
+          </a:xfrm>
+          <a:prstGeom prst="rect">
+            <a:avLst/>
+          </a:prstGeom>
+          <a:noFill/>
+        </p:spPr>
+        <p:txBody>
+          <a:bodyPr wrap="square" anchor="ctr" lIns="0" rIns="0" tIns="0" bIns="0">
+            <a:spAutoFit/>
+          </a:bodyPr>
+          <a:lstStyle/>
+          <a:p>
+            <a:pPr algn="ctr"/>
+            <a:r>
+              <a:rPr sz="1000" b="1" i="0">
+                <a:solidFill>
+                  <a:srgbClr val="FFFFFF"/>
+                </a:solidFill>
+                <a:latin typeface="Arial"/>
+              </a:rPr>
+              <a:t>28 %</a:t>
+            </a:r>
+          </a:p>
+        </p:txBody>
+      </p:sp>
+      <p:sp>
+        <p:nvSpPr>
+          <p:cNvPr id="92" name="Rectangle 91"/>
           <p:cNvSpPr/>
           <p:nvPr/>
         </p:nvSpPr>
         <p:spPr>
           <a:xfrm>
-            <a:off x="10564368" y="5174284"/>
-            <a:ext cx="475488" cy="93878"/>
+            <a:off x="10564368" y="5362041"/>
+            <a:ext cx="475488" cy="187756"/>
           </a:xfrm>
           <a:prstGeom prst="rect">
             <a:avLst/>
@@ -6597,14 +6711,14 @@
       </p:sp>
       <p:sp>
         <p:nvSpPr>
-          <p:cNvPr id="90" name="Rectangle 89"/>
+          <p:cNvPr id="93" name="Rectangle 92"/>
           <p:cNvSpPr/>
           <p:nvPr/>
         </p:nvSpPr>
         <p:spPr>
           <a:xfrm>
-            <a:off x="10564368" y="5268163"/>
-            <a:ext cx="475488" cy="93878"/>
+            <a:off x="10564368" y="5549798"/>
+            <a:ext cx="475488" cy="107289"/>
           </a:xfrm>
           <a:prstGeom prst="rect">
             <a:avLst/>
@@ -6641,14 +6755,14 @@
       </p:sp>
       <p:sp>
         <p:nvSpPr>
-          <p:cNvPr id="91" name="Rectangle 90"/>
+          <p:cNvPr id="94" name="Rectangle 93"/>
           <p:cNvSpPr/>
           <p:nvPr/>
         </p:nvSpPr>
         <p:spPr>
           <a:xfrm>
-            <a:off x="10564368" y="5362041"/>
-            <a:ext cx="475488" cy="80467"/>
+            <a:off x="10564368" y="5657088"/>
+            <a:ext cx="475488" cy="67056"/>
           </a:xfrm>
           <a:prstGeom prst="rect">
             <a:avLst/>
@@ -6685,14 +6799,14 @@
       </p:sp>
       <p:sp>
         <p:nvSpPr>
-          <p:cNvPr id="92" name="Rectangle 91"/>
+          <p:cNvPr id="95" name="Rectangle 94"/>
           <p:cNvSpPr/>
           <p:nvPr/>
         </p:nvSpPr>
         <p:spPr>
           <a:xfrm>
-            <a:off x="10564368" y="5442508"/>
-            <a:ext cx="475488" cy="348691"/>
+            <a:off x="10564368" y="5724144"/>
+            <a:ext cx="475488" cy="53644"/>
           </a:xfrm>
           <a:prstGeom prst="rect">
             <a:avLst/>
@@ -6729,36 +6843,45 @@
       </p:sp>
       <p:sp>
         <p:nvSpPr>
-          <p:cNvPr id="93" name="TextBox 92"/>
-          <p:cNvSpPr txBox="1"/>
-          <p:nvPr/>
-        </p:nvSpPr>
-        <p:spPr>
-          <a:xfrm>
-            <a:off x="10564368" y="5442508"/>
-            <a:ext cx="475488" cy="348691"/>
-          </a:xfrm>
-          <a:prstGeom prst="rect">
-            <a:avLst/>
-          </a:prstGeom>
-          <a:noFill/>
-        </p:spPr>
-        <p:txBody>
-          <a:bodyPr wrap="square" anchor="ctr" lIns="0" rIns="0" tIns="0" bIns="0">
-            <a:spAutoFit/>
-          </a:bodyPr>
+          <p:cNvPr id="96" name="Rectangle 95"/>
+          <p:cNvSpPr/>
+          <p:nvPr/>
+        </p:nvSpPr>
+        <p:spPr>
+          <a:xfrm>
+            <a:off x="10564368" y="5777788"/>
+            <a:ext cx="475488" cy="13411"/>
+          </a:xfrm>
+          <a:prstGeom prst="rect">
+            <a:avLst/>
+          </a:prstGeom>
+          <a:solidFill>
+            <a:srgbClr val="8CB36B"/>
+          </a:solidFill>
+          <a:ln>
+            <a:noFill/>
+          </a:ln>
+          <a:effectLst/>
+        </p:spPr>
+        <p:style>
+          <a:lnRef idx="1">
+            <a:schemeClr val="accent1"/>
+          </a:lnRef>
+          <a:fillRef idx="3">
+            <a:schemeClr val="accent1"/>
+          </a:fillRef>
+          <a:effectRef idx="2">
+            <a:schemeClr val="accent1"/>
+          </a:effectRef>
+          <a:fontRef idx="minor">
+            <a:schemeClr val="lt1"/>
+          </a:fontRef>
+        </p:style>
+        <p:txBody>
+          <a:bodyPr rtlCol="0" anchor="ctr"/>
           <a:lstStyle/>
           <a:p>
             <a:pPr algn="ctr"/>
-            <a:r>
-              <a:rPr sz="1000" b="1" i="0">
-                <a:solidFill>
-                  <a:srgbClr val="FFFFFF"/>
-                </a:solidFill>
-                <a:latin typeface="Arial"/>
-              </a:rPr>
-              <a:t>26 %</a:t>
-            </a:r>
           </a:p>
         </p:txBody>
       </p:sp>
@@ -6933,7 +7056,7 @@
                 </a:solidFill>
                 <a:latin typeface="Arial"/>
               </a:rPr>
-              <a:t>Cdiscount Voyages · Séjours</a:t>
+              <a:t>Cdiscount Voyages – Séjours</a:t>
             </a:r>
           </a:p>
         </p:txBody>
@@ -7012,7 +7135,7 @@
                 </a:solidFill>
                 <a:latin typeface="Arial"/>
               </a:rPr>
-              <a:t>À définir</a:t>
+              <a:t>Atteindre un ROI de 12 pour un CA de 30 k€.</a:t>
             </a:r>
           </a:p>
         </p:txBody>
@@ -7570,7 +7693,7 @@
                 </a:solidFill>
                 <a:latin typeface="Arial"/>
               </a:rPr>
-              <a:t>4 réservations en septembre pour 1 119 € de GMV (2 en août). Le ROAS passe de 0,82 à 1,30.</a:t>
+              <a:t>4 réservations en septembre pour 1 119 € de GMV (2 en août). Le ROAS passe de 0,82 à 1,30, encore loin de l'objectif de 12.</a:t>
             </a:r>
           </a:p>
         </p:txBody>

--- a/rapports/septembre/Cdiscount_Voyages_Sejours_sept2026.pptx
+++ b/rapports/septembre/Cdiscount_Voyages_Sejours_sept2026.pptx
@@ -6028,7 +6028,7 @@
                 </a:solidFill>
                 <a:latin typeface="Arial"/>
               </a:rPr>
-              <a:t>Campings et camping-cars</a:t>
+              <a:t>Campings et camping-cars · &lt; 1 %</a:t>
             </a:r>
           </a:p>
         </p:txBody>
@@ -6107,7 +6107,7 @@
                 </a:solidFill>
                 <a:latin typeface="Arial"/>
               </a:rPr>
-              <a:t>Hôtels et hébergements · 28 %</a:t>
+              <a:t>Hôtels et hébergements · 89 %</a:t>
             </a:r>
           </a:p>
         </p:txBody>
@@ -6186,7 +6186,7 @@
                 </a:solidFill>
                 <a:latin typeface="Arial"/>
               </a:rPr>
-              <a:t>Croisières, ferries et trains · 14 %</a:t>
+              <a:t>Croisières, ferries et trains · &lt; 1 %</a:t>
             </a:r>
           </a:p>
         </p:txBody>
@@ -6265,7 +6265,7 @@
                 </a:solidFill>
                 <a:latin typeface="Arial"/>
               </a:rPr>
-              <a:t>Séjours tout compris · 8 %</a:t>
+              <a:t>Séjours tout compris · 11 %</a:t>
             </a:r>
           </a:p>
         </p:txBody>
@@ -6338,13 +6338,13 @@
           <a:p>
             <a:pPr algn="l"/>
             <a:r>
-              <a:rPr sz="1000" b="0" i="0">
+              <a:rPr sz="800" b="0" i="0">
                 <a:solidFill>
                   <a:srgbClr val="111111"/>
                 </a:solidFill>
                 <a:latin typeface="Arial"/>
               </a:rPr>
-              <a:t>Parcs et séjours en famille · 5 %</a:t>
+              <a:t>Parcs et séjours en famille · &lt; 1 %</a:t>
             </a:r>
           </a:p>
         </p:txBody>
@@ -6423,7 +6423,7 @@
                 </a:solidFill>
                 <a:latin typeface="Arial"/>
               </a:rPr>
-              <a:t>Vols et billets d'avion · 4 %</a:t>
+              <a:t>Vols et billets d'avion · &lt; 1 %</a:t>
             </a:r>
           </a:p>
         </p:txBody>
@@ -6502,7 +6502,7 @@
                 </a:solidFill>
                 <a:latin typeface="Arial"/>
               </a:rPr>
-              <a:t>Bien-être et thalasso · 1 %</a:t>
+              <a:t>Bien-être et thalasso · &lt; 1 %</a:t>
             </a:r>
           </a:p>
         </p:txBody>
@@ -6516,7 +6516,7 @@
         <p:spPr>
           <a:xfrm>
             <a:off x="10564368" y="4450080"/>
-            <a:ext cx="475488" cy="536448"/>
+            <a:ext cx="475488" cy="0"/>
           </a:xfrm>
           <a:prstGeom prst="rect">
             <a:avLst/>
@@ -6553,49 +6553,14 @@
       </p:sp>
       <p:sp>
         <p:nvSpPr>
-          <p:cNvPr id="89" name="TextBox 88"/>
-          <p:cNvSpPr txBox="1"/>
+          <p:cNvPr id="89" name="Rectangle 88"/>
+          <p:cNvSpPr/>
           <p:nvPr/>
         </p:nvSpPr>
         <p:spPr>
           <a:xfrm>
             <a:off x="10564368" y="4450080"/>
-            <a:ext cx="475488" cy="536448"/>
-          </a:xfrm>
-          <a:prstGeom prst="rect">
-            <a:avLst/>
-          </a:prstGeom>
-          <a:noFill/>
-        </p:spPr>
-        <p:txBody>
-          <a:bodyPr wrap="square" anchor="ctr" lIns="0" rIns="0" tIns="0" bIns="0">
-            <a:spAutoFit/>
-          </a:bodyPr>
-          <a:lstStyle/>
-          <a:p>
-            <a:pPr algn="ctr"/>
-            <a:r>
-              <a:rPr sz="1000" b="1" i="0">
-                <a:solidFill>
-                  <a:srgbClr val="FFFFFF"/>
-                </a:solidFill>
-                <a:latin typeface="Arial"/>
-              </a:rPr>
-              <a:t>40 %</a:t>
-            </a:r>
-          </a:p>
-        </p:txBody>
-      </p:sp>
-      <p:sp>
-        <p:nvSpPr>
-          <p:cNvPr id="90" name="Rectangle 89"/>
-          <p:cNvSpPr/>
-          <p:nvPr/>
-        </p:nvSpPr>
-        <p:spPr>
-          <a:xfrm>
-            <a:off x="10564368" y="4986528"/>
-            <a:ext cx="475488" cy="375513"/>
+            <a:ext cx="475488" cy="1193596"/>
           </a:xfrm>
           <a:prstGeom prst="rect">
             <a:avLst/>
@@ -6632,14 +6597,14 @@
       </p:sp>
       <p:sp>
         <p:nvSpPr>
-          <p:cNvPr id="91" name="TextBox 90"/>
+          <p:cNvPr id="90" name="TextBox 89"/>
           <p:cNvSpPr txBox="1"/>
           <p:nvPr/>
         </p:nvSpPr>
         <p:spPr>
           <a:xfrm>
-            <a:off x="10564368" y="4986528"/>
-            <a:ext cx="475488" cy="375513"/>
+            <a:off x="10564368" y="4450080"/>
+            <a:ext cx="475488" cy="1193596"/>
           </a:xfrm>
           <a:prstGeom prst="rect">
             <a:avLst/>
@@ -6660,21 +6625,21 @@
                 </a:solidFill>
                 <a:latin typeface="Arial"/>
               </a:rPr>
-              <a:t>28 %</a:t>
-            </a:r>
-          </a:p>
-        </p:txBody>
-      </p:sp>
-      <p:sp>
-        <p:nvSpPr>
-          <p:cNvPr id="92" name="Rectangle 91"/>
+              <a:t>89 %</a:t>
+            </a:r>
+          </a:p>
+        </p:txBody>
+      </p:sp>
+      <p:sp>
+        <p:nvSpPr>
+          <p:cNvPr id="91" name="Rectangle 90"/>
           <p:cNvSpPr/>
           <p:nvPr/>
         </p:nvSpPr>
         <p:spPr>
           <a:xfrm>
-            <a:off x="10564368" y="5362041"/>
-            <a:ext cx="475488" cy="187756"/>
+            <a:off x="10564368" y="5643676"/>
+            <a:ext cx="475488" cy="0"/>
           </a:xfrm>
           <a:prstGeom prst="rect">
             <a:avLst/>
@@ -6711,14 +6676,14 @@
       </p:sp>
       <p:sp>
         <p:nvSpPr>
-          <p:cNvPr id="93" name="Rectangle 92"/>
+          <p:cNvPr id="92" name="Rectangle 91"/>
           <p:cNvSpPr/>
           <p:nvPr/>
         </p:nvSpPr>
         <p:spPr>
           <a:xfrm>
-            <a:off x="10564368" y="5549798"/>
-            <a:ext cx="475488" cy="107289"/>
+            <a:off x="10564368" y="5643676"/>
+            <a:ext cx="475488" cy="147523"/>
           </a:xfrm>
           <a:prstGeom prst="rect">
             <a:avLst/>
@@ -6755,14 +6720,14 @@
       </p:sp>
       <p:sp>
         <p:nvSpPr>
-          <p:cNvPr id="94" name="Rectangle 93"/>
+          <p:cNvPr id="93" name="Rectangle 92"/>
           <p:cNvSpPr/>
           <p:nvPr/>
         </p:nvSpPr>
         <p:spPr>
           <a:xfrm>
-            <a:off x="10564368" y="5657088"/>
-            <a:ext cx="475488" cy="67056"/>
+            <a:off x="10564368" y="5791200"/>
+            <a:ext cx="475488" cy="0"/>
           </a:xfrm>
           <a:prstGeom prst="rect">
             <a:avLst/>
@@ -6799,14 +6764,14 @@
       </p:sp>
       <p:sp>
         <p:nvSpPr>
-          <p:cNvPr id="95" name="Rectangle 94"/>
+          <p:cNvPr id="94" name="Rectangle 93"/>
           <p:cNvSpPr/>
           <p:nvPr/>
         </p:nvSpPr>
         <p:spPr>
           <a:xfrm>
-            <a:off x="10564368" y="5724144"/>
-            <a:ext cx="475488" cy="53644"/>
+            <a:off x="10564368" y="5791200"/>
+            <a:ext cx="475488" cy="0"/>
           </a:xfrm>
           <a:prstGeom prst="rect">
             <a:avLst/>
@@ -6843,14 +6808,14 @@
       </p:sp>
       <p:sp>
         <p:nvSpPr>
-          <p:cNvPr id="96" name="Rectangle 95"/>
+          <p:cNvPr id="95" name="Rectangle 94"/>
           <p:cNvSpPr/>
           <p:nvPr/>
         </p:nvSpPr>
         <p:spPr>
           <a:xfrm>
-            <a:off x="10564368" y="5777788"/>
-            <a:ext cx="475488" cy="13411"/>
+            <a:off x="10564368" y="5791200"/>
+            <a:ext cx="475488" cy="0"/>
           </a:xfrm>
           <a:prstGeom prst="rect">
             <a:avLst/>
@@ -7286,7 +7251,7 @@
                 </a:solidFill>
                 <a:latin typeface="Arial"/>
               </a:rPr>
-              <a:t>Le départ en vacances concentre la demande</a:t>
+              <a:t>Mettre en avant une destination précise</a:t>
             </a:r>
           </a:p>
         </p:txBody>
@@ -7321,7 +7286,7 @@
                 </a:solidFill>
                 <a:latin typeface="Arial"/>
               </a:rPr>
-              <a:t>82,3 % des conversations du secteur sont déclenchées par un départ en vacances, avec des recherches de billets d'avion et d'agence.</a:t>
+              <a:t>Les annonces qui décrivent un hôtel et sa destination (Fuerteventura, Majorque, Grèce, Dubaï) atteignent jusqu'à 1,23 fois le CTR moyen.</a:t>
             </a:r>
           </a:p>
         </p:txBody>
@@ -7356,7 +7321,7 @@
                 </a:solidFill>
                 <a:latin typeface="Arial"/>
               </a:rPr>
-              <a:t>→  Associer chaque séjour à une date de départ proche : « Partez aux vacances de la Toussaint ».</a:t>
+              <a:t>→  Construire chaque annonce autour d'un lieu et de ce qu'on y vit.</a:t>
             </a:r>
           </a:p>
         </p:txBody>
@@ -7472,7 +7437,7 @@
                 </a:solidFill>
                 <a:latin typeface="Arial"/>
               </a:rPr>
-              <a:t>Gagner en visibilité face à Airbnb et Booking</a:t>
+              <a:t>L'annonce générique sous-performe</a:t>
             </a:r>
           </a:p>
         </p:txBody>
@@ -7507,7 +7472,7 @@
                 </a:solidFill>
                 <a:latin typeface="Arial"/>
               </a:rPr>
-              <a:t>Cdiscount Voyages reste sous 0,1 % de part de voix (13e), face à Airbnb (31,8 %) et Booking (21,6 %). Côté ads : 4,0 %.</a:t>
+              <a:t>L'annonce « Séjour pas cher – Paiement en 4x » reste à 0,86 fois la moyenne.</a:t>
             </a:r>
           </a:p>
         </p:txBody>
@@ -7542,7 +7507,7 @@
                 </a:solidFill>
                 <a:latin typeface="Arial"/>
               </a:rPr>
-              <a:t>→  Élargir les topics ciblés (séjours, clubs, tout compris) pour augmenter la présence publicitaire.</a:t>
+              <a:t>→  Garder le paiement en 4x comme argument secondaire, après la destination.</a:t>
             </a:r>
           </a:p>
         </p:txBody>
@@ -7658,7 +7623,7 @@
                 </a:solidFill>
                 <a:latin typeface="Arial"/>
               </a:rPr>
-              <a:t>Des réservations en hausse</a:t>
+              <a:t>Les Canaries et les Baléares portent la campagne</a:t>
             </a:r>
           </a:p>
         </p:txBody>
@@ -7693,7 +7658,7 @@
                 </a:solidFill>
                 <a:latin typeface="Arial"/>
               </a:rPr>
-              <a:t>4 réservations en septembre pour 1 119 € de GMV (2 en août). Le ROAS passe de 0,82 à 1,30, encore loin de l'objectif de 12.</a:t>
+              <a:t>Les Canaries et les Baléares représentent 29 % de la diffusion, avec des CTR au-dessus de la moyenne.</a:t>
             </a:r>
           </a:p>
         </p:txBody>
@@ -7728,7 +7693,7 @@
                 </a:solidFill>
                 <a:latin typeface="Arial"/>
               </a:rPr>
-              <a:t>→  Accélérer sur les offres qui convertissent, avant la fin de tranche.</a:t>
+              <a:t>→  Préparer les séjours soleil d'hiver (Canaries, Égypte, Dubaï) pour la Toussaint et Noël.</a:t>
             </a:r>
           </a:p>
         </p:txBody>
@@ -7844,7 +7809,7 @@
                 </a:solidFill>
                 <a:latin typeface="Arial"/>
               </a:rPr>
-              <a:t>Moins d'impressions, plus de clics</a:t>
+              <a:t>Des réservations en hausse</a:t>
             </a:r>
           </a:p>
         </p:txBody>
@@ -7879,7 +7844,7 @@
                 </a:solidFill>
                 <a:latin typeface="Arial"/>
               </a:rPr>
-              <a:t>Les impressions baissent de 52 %, mais les clics progressent de 26 %. Le CTR passe de 0,19 % à 0,50 %.</a:t>
+              <a:t>4 réservations pour 1 119 € de GMV. Le ROAS passe de 0,82 à 1,30.</a:t>
             </a:r>
           </a:p>
         </p:txBody>
@@ -7914,7 +7879,7 @@
                 </a:solidFill>
                 <a:latin typeface="Arial"/>
               </a:rPr>
-              <a:t>→  Conserver le ciblage resserré et tester des accroches prix / dernière minute.</a:t>
+              <a:t>→  Concentrer le budget sur les offres qui convertissent.</a:t>
             </a:r>
           </a:p>
         </p:txBody>

--- a/rapports/septembre/Cdiscount_Voyages_Sejours_sept2026.pptx
+++ b/rapports/septembre/Cdiscount_Voyages_Sejours_sept2026.pptx
@@ -5283,16 +5283,16 @@
               </a:spcAft>
             </a:pPr>
             <a:r>
+              <a:rPr sz="2000" b="1" i="0">
+                <a:solidFill>
+                  <a:srgbClr val="EE6A2C"/>
+                </a:solidFill>
+                <a:latin typeface="Arial"/>
+              </a:rPr>
+              <a:t>hôtel</a:t>
+            </a:r>
+            <a:r>
               <a:rPr sz="1800" b="1" i="0">
-                <a:solidFill>
-                  <a:srgbClr val="EE6A2C"/>
-                </a:solidFill>
-                <a:latin typeface="Arial"/>
-              </a:rPr>
-              <a:t>départ en vacances</a:t>
-            </a:r>
-            <a:r>
-              <a:rPr sz="1600" b="1" i="0">
                 <a:solidFill>
                   <a:srgbClr val="111111"/>
                 </a:solidFill>
@@ -5314,7 +5314,7 @@
                 </a:solidFill>
                 <a:latin typeface="Arial"/>
               </a:rPr>
-              <a:t>Airbnb</a:t>
+              <a:t>Canaries</a:t>
             </a:r>
             <a:r>
               <a:rPr sz="1400" b="1" i="0">
@@ -5323,7 +5323,7 @@
                 </a:solidFill>
                 <a:latin typeface="Arial"/>
               </a:rPr>
-              <a:t>   Booking</a:t>
+              <a:t>   Baléares</a:t>
             </a:r>
           </a:p>
           <a:p>
@@ -5339,7 +5339,7 @@
                 </a:solidFill>
                 <a:latin typeface="Arial"/>
               </a:rPr>
-              <a:t>Club Med</a:t>
+              <a:t>tout compris</a:t>
             </a:r>
             <a:r>
               <a:rPr sz="1200" b="0" i="0">
@@ -5348,7 +5348,16 @@
                 </a:solidFill>
                 <a:latin typeface="Arial"/>
               </a:rPr>
-              <a:t>   Pierre &amp; Vacances</a:t>
+              <a:t>   club</a:t>
+            </a:r>
+            <a:r>
+              <a:rPr sz="1200" b="1" i="0">
+                <a:solidFill>
+                  <a:srgbClr val="111111"/>
+                </a:solidFill>
+                <a:latin typeface="Arial"/>
+              </a:rPr>
+              <a:t>   soleil</a:t>
             </a:r>
           </a:p>
           <a:p>
@@ -5364,7 +5373,7 @@
                 </a:solidFill>
                 <a:latin typeface="Arial"/>
               </a:rPr>
-              <a:t>billets d'avion</a:t>
+              <a:t>Fuerteventura</a:t>
             </a:r>
             <a:r>
               <a:rPr sz="1100" b="1" i="0">
@@ -5373,7 +5382,16 @@
                 </a:solidFill>
                 <a:latin typeface="Arial"/>
               </a:rPr>
-              <a:t>   Transavia</a:t>
+              <a:t>   Majorque</a:t>
+            </a:r>
+            <a:r>
+              <a:rPr sz="1100" b="0" i="0">
+                <a:solidFill>
+                  <a:srgbClr val="555B66"/>
+                </a:solidFill>
+                <a:latin typeface="Arial"/>
+              </a:rPr>
+              <a:t>   Grèce</a:t>
             </a:r>
           </a:p>
           <a:p>
@@ -5389,7 +5407,7 @@
                 </a:solidFill>
                 <a:latin typeface="Arial"/>
               </a:rPr>
-              <a:t>valise cabine</a:t>
+              <a:t>paiement en 4 fois</a:t>
             </a:r>
             <a:r>
               <a:rPr sz="1100" b="0" i="0">
@@ -5398,7 +5416,16 @@
                 </a:solidFill>
                 <a:latin typeface="Arial"/>
               </a:rPr>
-              <a:t>   trousse de toilette</a:t>
+              <a:t>   plage</a:t>
+            </a:r>
+            <a:r>
+              <a:rPr sz="1100" b="1" i="0">
+                <a:solidFill>
+                  <a:srgbClr val="EE6A2C"/>
+                </a:solidFill>
+                <a:latin typeface="Arial"/>
+              </a:rPr>
+              <a:t>   Dubaï</a:t>
             </a:r>
           </a:p>
           <a:p>
@@ -5414,7 +5441,7 @@
                 </a:solidFill>
                 <a:latin typeface="Arial"/>
               </a:rPr>
-              <a:t>Center Parcs</a:t>
+              <a:t>Tunisie</a:t>
             </a:r>
             <a:r>
               <a:rPr sz="1100" b="0" i="0">
@@ -5423,16 +5450,7 @@
                 </a:solidFill>
                 <a:latin typeface="Arial"/>
               </a:rPr>
-              <a:t>   TUI</a:t>
-            </a:r>
-            <a:r>
-              <a:rPr sz="1100" b="0" i="0">
-                <a:solidFill>
-                  <a:srgbClr val="EE6A2C"/>
-                </a:solidFill>
-                <a:latin typeface="Arial"/>
-              </a:rPr>
-              <a:t>   Lastminute</a:t>
+              <a:t>   petit prix</a:t>
             </a:r>
           </a:p>
         </p:txBody>
@@ -5616,7 +5634,7 @@
                 </a:solidFill>
                 <a:latin typeface="Arial"/>
               </a:rPr>
-              <a:t>Comment choisir un sac cabine conforme aux dimensions des compagnies ?</a:t>
+              <a:t>Où partir au soleil en octobre ?</a:t>
             </a:r>
           </a:p>
         </p:txBody>
@@ -5730,7 +5748,7 @@
                 </a:solidFill>
                 <a:latin typeface="Arial"/>
               </a:rPr>
-              <a:t>Comment organiser une trousse de toilette conforme aux règles de sécurité ?</a:t>
+              <a:t>Quel séjour tout compris pour une famille ?</a:t>
             </a:r>
           </a:p>
         </p:txBody>
@@ -5844,14 +5862,128 @@
                 </a:solidFill>
                 <a:latin typeface="Arial"/>
               </a:rPr>
-              <a:t>Quelles offres ou prix pour une pochette Faraday ?</a:t>
-            </a:r>
-          </a:p>
-        </p:txBody>
-      </p:sp>
-      <p:sp>
-        <p:nvSpPr>
-          <p:cNvPr id="71" name="TextBox 70"/>
+              <a:t>Peut-on payer un voyage en quatre fois ?</a:t>
+            </a:r>
+          </a:p>
+        </p:txBody>
+      </p:sp>
+      <p:sp>
+        <p:nvSpPr>
+          <p:cNvPr id="71" name="Rectangle 70"/>
+          <p:cNvSpPr/>
+          <p:nvPr/>
+        </p:nvSpPr>
+        <p:spPr>
+          <a:xfrm>
+            <a:off x="4437888" y="5364480"/>
+            <a:ext cx="2913888" cy="304800"/>
+          </a:xfrm>
+          <a:prstGeom prst="rect">
+            <a:avLst/>
+          </a:prstGeom>
+          <a:solidFill>
+            <a:srgbClr val="F1EFEA"/>
+          </a:solidFill>
+          <a:ln>
+            <a:noFill/>
+          </a:ln>
+          <a:effectLst/>
+        </p:spPr>
+        <p:style>
+          <a:lnRef idx="1">
+            <a:schemeClr val="accent1"/>
+          </a:lnRef>
+          <a:fillRef idx="3">
+            <a:schemeClr val="accent1"/>
+          </a:fillRef>
+          <a:effectRef idx="2">
+            <a:schemeClr val="accent1"/>
+          </a:effectRef>
+          <a:fontRef idx="minor">
+            <a:schemeClr val="lt1"/>
+          </a:fontRef>
+        </p:style>
+        <p:txBody>
+          <a:bodyPr rtlCol="0" anchor="ctr"/>
+          <a:lstStyle/>
+          <a:p>
+            <a:pPr algn="ctr"/>
+          </a:p>
+        </p:txBody>
+      </p:sp>
+      <p:sp>
+        <p:nvSpPr>
+          <p:cNvPr id="72" name="TextBox 71"/>
+          <p:cNvSpPr txBox="1"/>
+          <p:nvPr/>
+        </p:nvSpPr>
+        <p:spPr>
+          <a:xfrm>
+            <a:off x="4559808" y="5364480"/>
+            <a:ext cx="182880" cy="304800"/>
+          </a:xfrm>
+          <a:prstGeom prst="rect">
+            <a:avLst/>
+          </a:prstGeom>
+          <a:noFill/>
+        </p:spPr>
+        <p:txBody>
+          <a:bodyPr wrap="square" anchor="ctr" lIns="0" rIns="0" tIns="0" bIns="0">
+            <a:spAutoFit/>
+          </a:bodyPr>
+          <a:lstStyle/>
+          <a:p>
+            <a:pPr algn="l"/>
+            <a:r>
+              <a:rPr sz="900" b="0" i="0">
+                <a:solidFill>
+                  <a:srgbClr val="555B66"/>
+                </a:solidFill>
+                <a:latin typeface="Arial"/>
+              </a:rPr>
+              <a:t>🔍</a:t>
+            </a:r>
+          </a:p>
+        </p:txBody>
+      </p:sp>
+      <p:sp>
+        <p:nvSpPr>
+          <p:cNvPr id="73" name="TextBox 72"/>
+          <p:cNvSpPr txBox="1"/>
+          <p:nvPr/>
+        </p:nvSpPr>
+        <p:spPr>
+          <a:xfrm>
+            <a:off x="4791456" y="5364480"/>
+            <a:ext cx="2499360" cy="304800"/>
+          </a:xfrm>
+          <a:prstGeom prst="rect">
+            <a:avLst/>
+          </a:prstGeom>
+          <a:noFill/>
+        </p:spPr>
+        <p:txBody>
+          <a:bodyPr wrap="square" anchor="ctr" lIns="0" rIns="0" tIns="0" bIns="0">
+            <a:spAutoFit/>
+          </a:bodyPr>
+          <a:lstStyle/>
+          <a:p>
+            <a:pPr algn="l"/>
+            <a:r>
+              <a:rPr sz="900" b="0" i="0">
+                <a:solidFill>
+                  <a:srgbClr val="111111"/>
+                </a:solidFill>
+                <a:latin typeface="Arial"/>
+              </a:rPr>
+              <a:t>Quel hôtel choisir aux Canaries pour la Toussaint ?</a:t>
+            </a:r>
+          </a:p>
+        </p:txBody>
+      </p:sp>
+      <p:sp>
+        <p:nvSpPr>
+          <p:cNvPr id="74" name="TextBox 73"/>
           <p:cNvSpPr txBox="1"/>
           <p:nvPr/>
         </p:nvSpPr>
@@ -5886,7 +6018,7 @@
       </p:sp>
       <p:sp>
         <p:nvSpPr>
-          <p:cNvPr id="72" name="TextBox 71"/>
+          <p:cNvPr id="75" name="TextBox 74"/>
           <p:cNvSpPr txBox="1"/>
           <p:nvPr/>
         </p:nvSpPr>
@@ -5921,7 +6053,7 @@
       </p:sp>
       <p:sp>
         <p:nvSpPr>
-          <p:cNvPr id="73" name="TextBox 72"/>
+          <p:cNvPr id="76" name="TextBox 75"/>
           <p:cNvSpPr txBox="1"/>
           <p:nvPr/>
         </p:nvSpPr>
@@ -5956,7 +6088,7 @@
       </p:sp>
       <p:sp>
         <p:nvSpPr>
-          <p:cNvPr id="74" name="Rectangle 73"/>
+          <p:cNvPr id="77" name="Rectangle 76"/>
           <p:cNvSpPr/>
           <p:nvPr/>
         </p:nvSpPr>
@@ -6000,7 +6132,7 @@
       </p:sp>
       <p:sp>
         <p:nvSpPr>
-          <p:cNvPr id="75" name="TextBox 74"/>
+          <p:cNvPr id="78" name="TextBox 77"/>
           <p:cNvSpPr txBox="1"/>
           <p:nvPr/>
         </p:nvSpPr>
@@ -6035,7 +6167,7 @@
       </p:sp>
       <p:sp>
         <p:nvSpPr>
-          <p:cNvPr id="76" name="Rectangle 75"/>
+          <p:cNvPr id="79" name="Rectangle 78"/>
           <p:cNvSpPr/>
           <p:nvPr/>
         </p:nvSpPr>
@@ -6079,7 +6211,7 @@
       </p:sp>
       <p:sp>
         <p:nvSpPr>
-          <p:cNvPr id="77" name="TextBox 76"/>
+          <p:cNvPr id="80" name="TextBox 79"/>
           <p:cNvSpPr txBox="1"/>
           <p:nvPr/>
         </p:nvSpPr>
@@ -6114,7 +6246,7 @@
       </p:sp>
       <p:sp>
         <p:nvSpPr>
-          <p:cNvPr id="78" name="Rectangle 77"/>
+          <p:cNvPr id="81" name="Rectangle 80"/>
           <p:cNvSpPr/>
           <p:nvPr/>
         </p:nvSpPr>
@@ -6158,7 +6290,7 @@
       </p:sp>
       <p:sp>
         <p:nvSpPr>
-          <p:cNvPr id="79" name="TextBox 78"/>
+          <p:cNvPr id="82" name="TextBox 81"/>
           <p:cNvSpPr txBox="1"/>
           <p:nvPr/>
         </p:nvSpPr>
@@ -6193,7 +6325,7 @@
       </p:sp>
       <p:sp>
         <p:nvSpPr>
-          <p:cNvPr id="80" name="Rectangle 79"/>
+          <p:cNvPr id="83" name="Rectangle 82"/>
           <p:cNvSpPr/>
           <p:nvPr/>
         </p:nvSpPr>
@@ -6237,7 +6369,7 @@
       </p:sp>
       <p:sp>
         <p:nvSpPr>
-          <p:cNvPr id="81" name="TextBox 80"/>
+          <p:cNvPr id="84" name="TextBox 83"/>
           <p:cNvSpPr txBox="1"/>
           <p:nvPr/>
         </p:nvSpPr>
@@ -6272,7 +6404,7 @@
       </p:sp>
       <p:sp>
         <p:nvSpPr>
-          <p:cNvPr id="82" name="Rectangle 81"/>
+          <p:cNvPr id="85" name="Rectangle 84"/>
           <p:cNvSpPr/>
           <p:nvPr/>
         </p:nvSpPr>
@@ -6316,7 +6448,7 @@
       </p:sp>
       <p:sp>
         <p:nvSpPr>
-          <p:cNvPr id="83" name="TextBox 82"/>
+          <p:cNvPr id="86" name="TextBox 85"/>
           <p:cNvSpPr txBox="1"/>
           <p:nvPr/>
         </p:nvSpPr>
@@ -6351,7 +6483,7 @@
       </p:sp>
       <p:sp>
         <p:nvSpPr>
-          <p:cNvPr id="84" name="Rectangle 83"/>
+          <p:cNvPr id="87" name="Rectangle 86"/>
           <p:cNvSpPr/>
           <p:nvPr/>
         </p:nvSpPr>
@@ -6395,7 +6527,7 @@
       </p:sp>
       <p:sp>
         <p:nvSpPr>
-          <p:cNvPr id="85" name="TextBox 84"/>
+          <p:cNvPr id="88" name="TextBox 87"/>
           <p:cNvSpPr txBox="1"/>
           <p:nvPr/>
         </p:nvSpPr>
@@ -6430,7 +6562,7 @@
       </p:sp>
       <p:sp>
         <p:nvSpPr>
-          <p:cNvPr id="86" name="Rectangle 85"/>
+          <p:cNvPr id="89" name="Rectangle 88"/>
           <p:cNvSpPr/>
           <p:nvPr/>
         </p:nvSpPr>
@@ -6474,7 +6606,7 @@
       </p:sp>
       <p:sp>
         <p:nvSpPr>
-          <p:cNvPr id="87" name="TextBox 86"/>
+          <p:cNvPr id="90" name="TextBox 89"/>
           <p:cNvSpPr txBox="1"/>
           <p:nvPr/>
         </p:nvSpPr>
@@ -6509,7 +6641,7 @@
       </p:sp>
       <p:sp>
         <p:nvSpPr>
-          <p:cNvPr id="88" name="Rectangle 87"/>
+          <p:cNvPr id="91" name="Rectangle 90"/>
           <p:cNvSpPr/>
           <p:nvPr/>
         </p:nvSpPr>
@@ -6553,7 +6685,7 @@
       </p:sp>
       <p:sp>
         <p:nvSpPr>
-          <p:cNvPr id="89" name="Rectangle 88"/>
+          <p:cNvPr id="92" name="Rectangle 91"/>
           <p:cNvSpPr/>
           <p:nvPr/>
         </p:nvSpPr>
@@ -6597,7 +6729,7 @@
       </p:sp>
       <p:sp>
         <p:nvSpPr>
-          <p:cNvPr id="90" name="TextBox 89"/>
+          <p:cNvPr id="93" name="TextBox 92"/>
           <p:cNvSpPr txBox="1"/>
           <p:nvPr/>
         </p:nvSpPr>
@@ -6632,7 +6764,7 @@
       </p:sp>
       <p:sp>
         <p:nvSpPr>
-          <p:cNvPr id="91" name="Rectangle 90"/>
+          <p:cNvPr id="94" name="Rectangle 93"/>
           <p:cNvSpPr/>
           <p:nvPr/>
         </p:nvSpPr>
@@ -6676,7 +6808,7 @@
       </p:sp>
       <p:sp>
         <p:nvSpPr>
-          <p:cNvPr id="92" name="Rectangle 91"/>
+          <p:cNvPr id="95" name="Rectangle 94"/>
           <p:cNvSpPr/>
           <p:nvPr/>
         </p:nvSpPr>
@@ -6720,7 +6852,7 @@
       </p:sp>
       <p:sp>
         <p:nvSpPr>
-          <p:cNvPr id="93" name="Rectangle 92"/>
+          <p:cNvPr id="96" name="Rectangle 95"/>
           <p:cNvSpPr/>
           <p:nvPr/>
         </p:nvSpPr>
@@ -6764,7 +6896,7 @@
       </p:sp>
       <p:sp>
         <p:nvSpPr>
-          <p:cNvPr id="94" name="Rectangle 93"/>
+          <p:cNvPr id="97" name="Rectangle 96"/>
           <p:cNvSpPr/>
           <p:nvPr/>
         </p:nvSpPr>
@@ -6808,7 +6940,7 @@
       </p:sp>
       <p:sp>
         <p:nvSpPr>
-          <p:cNvPr id="95" name="Rectangle 94"/>
+          <p:cNvPr id="98" name="Rectangle 97"/>
           <p:cNvSpPr/>
           <p:nvPr/>
         </p:nvSpPr>
